--- a/p02/A-frame-geometric-objects.pptx
+++ b/p02/A-frame-geometric-objects.pptx
@@ -222,7 +222,7 @@
           <a:p>
             <a:fld id="{FA1E3CD0-6E24-4AC0-945A-82AEC1490673}" type="datetimeFigureOut">
               <a:rPr lang="en-US" smtClean="0"/>
-              <a:t>5/20/2026</a:t>
+              <a:t>10/7/2026</a:t>
             </a:fld>
             <a:endParaRPr lang="en-US"/>
           </a:p>
@@ -1023,7 +1023,7 @@
           <a:p>
             <a:fld id="{846CE7D5-CF57-46EF-B807-FDD0502418D4}" type="datetimeFigureOut">
               <a:rPr lang="en-US" smtClean="0"/>
-              <a:t>5/20/2026</a:t>
+              <a:t>10/7/2026</a:t>
             </a:fld>
             <a:endParaRPr lang="en-US"/>
           </a:p>
@@ -1193,7 +1193,7 @@
           <a:p>
             <a:fld id="{846CE7D5-CF57-46EF-B807-FDD0502418D4}" type="datetimeFigureOut">
               <a:rPr lang="en-US" smtClean="0"/>
-              <a:t>5/20/2026</a:t>
+              <a:t>10/7/2026</a:t>
             </a:fld>
             <a:endParaRPr lang="en-US"/>
           </a:p>
@@ -1373,7 +1373,7 @@
           <a:p>
             <a:fld id="{846CE7D5-CF57-46EF-B807-FDD0502418D4}" type="datetimeFigureOut">
               <a:rPr lang="en-US" smtClean="0"/>
-              <a:t>5/20/2026</a:t>
+              <a:t>10/7/2026</a:t>
             </a:fld>
             <a:endParaRPr lang="en-US"/>
           </a:p>
@@ -1543,7 +1543,7 @@
           <a:p>
             <a:fld id="{846CE7D5-CF57-46EF-B807-FDD0502418D4}" type="datetimeFigureOut">
               <a:rPr lang="en-US" smtClean="0"/>
-              <a:t>5/20/2026</a:t>
+              <a:t>10/7/2026</a:t>
             </a:fld>
             <a:endParaRPr lang="en-US"/>
           </a:p>
@@ -1789,7 +1789,7 @@
           <a:p>
             <a:fld id="{846CE7D5-CF57-46EF-B807-FDD0502418D4}" type="datetimeFigureOut">
               <a:rPr lang="en-US" smtClean="0"/>
-              <a:t>5/20/2026</a:t>
+              <a:t>10/7/2026</a:t>
             </a:fld>
             <a:endParaRPr lang="en-US"/>
           </a:p>
@@ -2021,7 +2021,7 @@
           <a:p>
             <a:fld id="{846CE7D5-CF57-46EF-B807-FDD0502418D4}" type="datetimeFigureOut">
               <a:rPr lang="en-US" smtClean="0"/>
-              <a:t>5/20/2026</a:t>
+              <a:t>10/7/2026</a:t>
             </a:fld>
             <a:endParaRPr lang="en-US"/>
           </a:p>
@@ -2388,7 +2388,7 @@
           <a:p>
             <a:fld id="{846CE7D5-CF57-46EF-B807-FDD0502418D4}" type="datetimeFigureOut">
               <a:rPr lang="en-US" smtClean="0"/>
-              <a:t>5/20/2026</a:t>
+              <a:t>10/7/2026</a:t>
             </a:fld>
             <a:endParaRPr lang="en-US"/>
           </a:p>
@@ -2506,7 +2506,7 @@
           <a:p>
             <a:fld id="{846CE7D5-CF57-46EF-B807-FDD0502418D4}" type="datetimeFigureOut">
               <a:rPr lang="en-US" smtClean="0"/>
-              <a:t>5/20/2026</a:t>
+              <a:t>10/7/2026</a:t>
             </a:fld>
             <a:endParaRPr lang="en-US"/>
           </a:p>
@@ -2601,7 +2601,7 @@
           <a:p>
             <a:fld id="{846CE7D5-CF57-46EF-B807-FDD0502418D4}" type="datetimeFigureOut">
               <a:rPr lang="en-US" smtClean="0"/>
-              <a:t>5/20/2026</a:t>
+              <a:t>10/7/2026</a:t>
             </a:fld>
             <a:endParaRPr lang="en-US"/>
           </a:p>
@@ -2878,7 +2878,7 @@
           <a:p>
             <a:fld id="{846CE7D5-CF57-46EF-B807-FDD0502418D4}" type="datetimeFigureOut">
               <a:rPr lang="en-US" smtClean="0"/>
-              <a:t>5/20/2026</a:t>
+              <a:t>10/7/2026</a:t>
             </a:fld>
             <a:endParaRPr lang="en-US"/>
           </a:p>
@@ -3135,7 +3135,7 @@
           <a:p>
             <a:fld id="{846CE7D5-CF57-46EF-B807-FDD0502418D4}" type="datetimeFigureOut">
               <a:rPr lang="en-US" smtClean="0"/>
-              <a:t>5/20/2026</a:t>
+              <a:t>10/7/2026</a:t>
             </a:fld>
             <a:endParaRPr lang="en-US"/>
           </a:p>
@@ -3348,7 +3348,7 @@
           <a:p>
             <a:fld id="{846CE7D5-CF57-46EF-B807-FDD0502418D4}" type="datetimeFigureOut">
               <a:rPr lang="en-US" smtClean="0"/>
-              <a:t>5/20/2026</a:t>
+              <a:t>10/7/2026</a:t>
             </a:fld>
             <a:endParaRPr lang="en-US"/>
           </a:p>
@@ -5338,7 +5338,7 @@
             </a:r>
             <a:r>
               <a:rPr lang="en-US" sz="2400" dirty="0"/>
-              <a:t>=“…”  by uploading</a:t>
+              <a:t>="…"  by uploading</a:t>
             </a:r>
           </a:p>
         </p:txBody>
@@ -5659,10 +5659,7 @@
                 <a:pPr/>
                 <a14:m>
                   <m:oMathPara xmlns:m="http://schemas.openxmlformats.org/officeDocument/2006/math">
-                    <m:oMathParaPr>
-                      <m:jc m:val="centerGroup"/>
-                    </m:oMathParaPr>
-                    <m:oMath xmlns:m="http://schemas.openxmlformats.org/officeDocument/2006/math">
+                    <m:oMath>
                       <m:r>
                         <a:rPr lang="en-US" sz="3600" b="0" i="1" smtClean="0">
                           <a:latin typeface="Cambria Math" panose="02040503050406030204" pitchFamily="18" charset="0"/>
@@ -5755,10 +5752,7 @@
                 <a:pPr/>
                 <a14:m>
                   <m:oMathPara xmlns:m="http://schemas.openxmlformats.org/officeDocument/2006/math">
-                    <m:oMathParaPr>
-                      <m:jc m:val="centerGroup"/>
-                    </m:oMathParaPr>
-                    <m:oMath xmlns:m="http://schemas.openxmlformats.org/officeDocument/2006/math">
+                    <m:oMath>
                       <m:r>
                         <a:rPr lang="en-US" sz="3600" b="0" i="1" smtClean="0">
                           <a:latin typeface="Cambria Math" panose="02040503050406030204" pitchFamily="18" charset="0"/>
@@ -5931,10 +5925,7 @@
                 <a:pPr/>
                 <a14:m>
                   <m:oMathPara xmlns:m="http://schemas.openxmlformats.org/officeDocument/2006/math">
-                    <m:oMathParaPr>
-                      <m:jc m:val="centerGroup"/>
-                    </m:oMathParaPr>
-                    <m:oMath xmlns:m="http://schemas.openxmlformats.org/officeDocument/2006/math">
+                    <m:oMath>
                       <m:r>
                         <a:rPr lang="en-US" sz="3600" b="0" i="1" smtClean="0">
                           <a:solidFill>
@@ -6658,22 +6649,22 @@
         <p:spPr/>
         <p:txBody>
           <a:bodyPr>
-            <a:normAutofit/>
+            <a:normAutofit lnSpcReduction="10000"/>
           </a:bodyPr>
           <a:lstStyle/>
           <a:p>
             <a:pPr marL="0" indent="0">
               <a:buNone/>
             </a:pPr>
-            <a:r>
-              <a:rPr lang="en-US" dirty="0">
-                <a:solidFill>
-                  <a:schemeClr val="accent5">
-                    <a:lumMod val="50000"/>
-                  </a:schemeClr>
-                </a:solidFill>
-              </a:rPr>
-              <a:t>A-box</a:t>
+            <a:endParaRPr lang="en-US" dirty="0"/>
+          </a:p>
+          <a:p>
+            <a:pPr marL="0" indent="0">
+              <a:buNone/>
+            </a:pPr>
+            <a:r>
+              <a:rPr lang="en-US" dirty="0"/>
+              <a:t>&lt;a-scene&gt;</a:t>
             </a:r>
           </a:p>
           <a:p>
@@ -6681,15 +6672,6 @@
               <a:buNone/>
             </a:pPr>
             <a:endParaRPr lang="en-US" dirty="0"/>
-          </a:p>
-          <a:p>
-            <a:pPr marL="0" indent="0">
-              <a:buNone/>
-            </a:pPr>
-            <a:r>
-              <a:rPr lang="en-US" dirty="0"/>
-              <a:t>&lt;a-scene&gt;</a:t>
-            </a:r>
           </a:p>
           <a:p>
             <a:pPr marL="0" indent="0">
@@ -6702,8 +6684,12 @@
               <a:buNone/>
             </a:pPr>
             <a:r>
+              <a:rPr lang="en-US" sz="2800"/>
+              <a:t>&lt;</a:t>
+            </a:r>
+            <a:r>
               <a:rPr lang="en-US" sz="2800" dirty="0"/>
-              <a:t> &lt;a-assets&gt;</a:t>
+              <a:t>a-assets&gt;</a:t>
             </a:r>
           </a:p>
           <a:p>
@@ -6758,8 +6744,33 @@
             </a:r>
             <a:r>
               <a:rPr lang="en-US" sz="2800" dirty="0"/>
-              <a:t>=“./IMAGES/…"</a:t>
-            </a:r>
+              <a:t>=</a:t>
+            </a:r>
+            <a:r>
+              <a:rPr lang="en-US" dirty="0"/>
+              <a:t>"</a:t>
+            </a:r>
+            <a:r>
+              <a:rPr lang="en-US" sz="2800" dirty="0"/>
+              <a:t>./IMAGES/…</a:t>
+            </a:r>
+            <a:r>
+              <a:rPr lang="en-US" dirty="0"/>
+              <a:t>"</a:t>
+            </a:r>
+            <a:r>
+              <a:rPr lang="en-US" sz="2800" dirty="0"/>
+              <a:t>&gt;&lt;/</a:t>
+            </a:r>
+            <a:r>
+              <a:rPr lang="en-US" sz="2800" dirty="0" err="1"/>
+              <a:t>img</a:t>
+            </a:r>
+            <a:r>
+              <a:rPr lang="en-US" dirty="0"/>
+              <a:t>&gt;</a:t>
+            </a:r>
+            <a:endParaRPr lang="en-US" sz="2800" dirty="0"/>
           </a:p>
           <a:p>
             <a:pPr marL="0" indent="0">
@@ -6775,6 +6786,17 @@
               <a:rPr lang="en-US" sz="2800" dirty="0"/>
               <a:t>&lt;/a-assets&gt;</a:t>
             </a:r>
+          </a:p>
+          <a:p>
+            <a:pPr marL="0" indent="0">
+              <a:lnSpc>
+                <a:spcPct val="100000"/>
+              </a:lnSpc>
+              <a:spcBef>
+                <a:spcPts val="0"/>
+              </a:spcBef>
+              <a:buNone/>
+            </a:pPr>
             <a:endParaRPr lang="en-US" dirty="0"/>
           </a:p>
           <a:p>
@@ -6815,11 +6837,11 @@
                   <a:srgbClr val="FF0000"/>
                 </a:solidFill>
               </a:rPr>
-              <a:t>" </a:t>
+              <a:t>"</a:t>
             </a:r>
             <a:r>
               <a:rPr lang="en-US" dirty="0"/>
-              <a:t>radius="1"&gt;&lt;/a-box&gt;</a:t>
+              <a:t>&gt;&lt;/a-box&gt;</a:t>
             </a:r>
           </a:p>
           <a:p>
@@ -6937,7 +6959,7 @@
             </a:pPr>
             <a:r>
               <a:rPr lang="en-US" dirty="0"/>
-              <a:t>&lt;a-box position="-1   0.5   -3" rotation="0 45 0" color=“red"&gt;&lt;/a-box&gt;</a:t>
+              <a:t>&lt;a-box position="-1   0.5   -3" rotation="0 45 0" color="red"&gt;&lt;/a-box&gt;</a:t>
             </a:r>
           </a:p>
           <a:p>
@@ -6952,7 +6974,7 @@
             </a:pPr>
             <a:r>
               <a:rPr lang="en-US" dirty="0"/>
-              <a:t>&lt;a-sphere position="0   1.25   -5" radius="1.25" color=“blue“&gt;&lt;/a-sphere&gt;</a:t>
+              <a:t>&lt;a-sphere position="0   1.25   -5" radius="1.25" color="blue"&gt;&lt;/a-sphere&gt;</a:t>
             </a:r>
           </a:p>
           <a:p>
@@ -7066,7 +7088,7 @@
         </p:spPr>
         <p:txBody>
           <a:bodyPr>
-            <a:normAutofit lnSpcReduction="10000"/>
+            <a:normAutofit/>
           </a:bodyPr>
           <a:lstStyle/>
           <a:p>
@@ -7075,25 +7097,97 @@
             </a:pPr>
             <a:r>
               <a:rPr lang="en-US" dirty="0"/>
-              <a:t>&lt;a-box position="-1   0.5   -3" rotation="0 45 0" color=“red"&gt;</a:t>
+              <a:t>&lt;</a:t>
+            </a:r>
+            <a:r>
+              <a:rPr lang="en-US" dirty="0">
+                <a:solidFill>
+                  <a:srgbClr val="FF0000"/>
+                </a:solidFill>
+              </a:rPr>
+              <a:t>a-box</a:t>
+            </a:r>
+            <a:r>
+              <a:rPr lang="en-US" dirty="0"/>
+              <a:t> position="-1   0.5   -3" rotation="0 45 0" color="red"&gt;&lt;/</a:t>
+            </a:r>
+            <a:r>
+              <a:rPr lang="en-US" dirty="0">
+                <a:solidFill>
+                  <a:srgbClr val="FF0000"/>
+                </a:solidFill>
+              </a:rPr>
+              <a:t>a-box</a:t>
+            </a:r>
+            <a:r>
+              <a:rPr lang="en-US" dirty="0"/>
+              <a:t>&gt;</a:t>
             </a:r>
           </a:p>
           <a:p>
             <a:pPr marL="0" indent="0">
               <a:buNone/>
             </a:pPr>
+            <a:endParaRPr lang="en-US" dirty="0"/>
+          </a:p>
+          <a:p>
+            <a:pPr marL="0" indent="0">
+              <a:buNone/>
+            </a:pPr>
             <a:r>
               <a:rPr lang="en-US" dirty="0"/>
-              <a:t>&lt;/a-box&gt;</a:t>
+              <a:t>&lt;</a:t>
+            </a:r>
+            <a:r>
+              <a:rPr lang="en-US" dirty="0">
+                <a:solidFill>
+                  <a:srgbClr val="FF0000"/>
+                </a:solidFill>
+              </a:rPr>
+              <a:t>a-sphere</a:t>
+            </a:r>
+            <a:r>
+              <a:rPr lang="en-US" dirty="0"/>
+              <a:t> position="0   1.25   -5" radius="1.25" color="blue"&gt;&lt;/</a:t>
+            </a:r>
+            <a:r>
+              <a:rPr lang="en-US" dirty="0">
+                <a:solidFill>
+                  <a:srgbClr val="FF0000"/>
+                </a:solidFill>
+              </a:rPr>
+              <a:t>a-sphere</a:t>
+            </a:r>
+            <a:r>
+              <a:rPr lang="en-US" dirty="0"/>
+              <a:t>&gt;</a:t>
             </a:r>
           </a:p>
           <a:p>
             <a:pPr marL="0" indent="0">
               <a:buNone/>
             </a:pPr>
+            <a:endParaRPr lang="en-US" dirty="0"/>
+          </a:p>
+          <a:p>
+            <a:pPr marL="0" indent="0">
+              <a:buNone/>
+            </a:pPr>
             <a:r>
               <a:rPr lang="en-US" dirty="0"/>
-              <a:t>&lt;a-sphere position="0   1.25   -5" radius="1.25" color=“blue“&gt;</a:t>
+              <a:t>&lt;</a:t>
+            </a:r>
+            <a:r>
+              <a:rPr lang="en-US" dirty="0">
+                <a:solidFill>
+                  <a:srgbClr val="FF0000"/>
+                </a:solidFill>
+              </a:rPr>
+              <a:t>a-cylinder</a:t>
+            </a:r>
+            <a:r>
+              <a:rPr lang="en-US" dirty="0"/>
+              <a:t> position="1   0.75   -3" radius="0.5" height="1.5" color="purple"&gt;</a:t>
             </a:r>
           </a:p>
           <a:p>
@@ -7102,34 +7196,46 @@
             </a:pPr>
             <a:r>
               <a:rPr lang="en-US" dirty="0"/>
-              <a:t>&lt;/a-sphere&gt;</a:t>
+              <a:t>&lt;/</a:t>
+            </a:r>
+            <a:r>
+              <a:rPr lang="en-US" dirty="0">
+                <a:solidFill>
+                  <a:srgbClr val="FF0000"/>
+                </a:solidFill>
+              </a:rPr>
+              <a:t>a-cylinder</a:t>
+            </a:r>
+            <a:r>
+              <a:rPr lang="en-US" dirty="0"/>
+              <a:t>&gt;</a:t>
             </a:r>
           </a:p>
           <a:p>
             <a:pPr marL="0" indent="0">
               <a:buNone/>
             </a:pPr>
+            <a:endParaRPr lang="en-US" dirty="0"/>
+          </a:p>
+          <a:p>
+            <a:pPr marL="0" indent="0">
+              <a:buNone/>
+            </a:pPr>
             <a:r>
               <a:rPr lang="en-US" dirty="0"/>
-              <a:t>&lt;a-cylinder position="1   0.75   -3" radius="0.5" height="1.5" color=“purple"&gt;</a:t>
-            </a:r>
-          </a:p>
-          <a:p>
-            <a:pPr marL="0" indent="0">
-              <a:buNone/>
-            </a:pPr>
+              <a:t>&lt;</a:t>
+            </a:r>
+            <a:r>
+              <a:rPr lang="en-US" dirty="0">
+                <a:solidFill>
+                  <a:srgbClr val="FF0000"/>
+                </a:solidFill>
+              </a:rPr>
+              <a:t>a-plane</a:t>
+            </a:r>
             <a:r>
               <a:rPr lang="en-US" dirty="0"/>
-              <a:t>&lt;/a-cylinder&gt;</a:t>
-            </a:r>
-          </a:p>
-          <a:p>
-            <a:pPr marL="0" indent="0">
-              <a:buNone/>
-            </a:pPr>
-            <a:r>
-              <a:rPr lang="en-US" dirty="0"/>
-              <a:t>&lt;a-plane position="0   0   -4" </a:t>
+              <a:t> position="0   0   -4" </a:t>
             </a:r>
             <a:r>
               <a:rPr lang="en-US" dirty="0">
@@ -7141,22 +7247,19 @@
             </a:r>
             <a:r>
               <a:rPr lang="en-US" dirty="0"/>
-              <a:t>width="4" height="4" color=“3cb371"&gt;&lt;/a-plane&gt;</a:t>
-            </a:r>
-          </a:p>
-          <a:p>
-            <a:pPr marL="0" indent="0">
-              <a:buNone/>
-            </a:pPr>
-            <a:endParaRPr lang="en-US" dirty="0"/>
-          </a:p>
-          <a:p>
-            <a:pPr marL="0" indent="0">
-              <a:buNone/>
-            </a:pPr>
+              <a:t>width="4" height="4" color="3cb371"&gt;&lt;/</a:t>
+            </a:r>
+            <a:r>
+              <a:rPr lang="en-US" dirty="0">
+                <a:solidFill>
+                  <a:srgbClr val="FF0000"/>
+                </a:solidFill>
+              </a:rPr>
+              <a:t>a-plane</a:t>
+            </a:r>
             <a:r>
               <a:rPr lang="en-US" dirty="0"/>
-              <a:t>&lt;a-sky color="#e9f7ff "&gt;&lt;/a-sky&gt;</a:t>
+              <a:t>&gt;</a:t>
             </a:r>
           </a:p>
         </p:txBody>

--- a/p02/A-frame-geometric-objects.pptx
+++ b/p02/A-frame-geometric-objects.pptx
@@ -222,7 +222,7 @@
           <a:p>
             <a:fld id="{FA1E3CD0-6E24-4AC0-945A-82AEC1490673}" type="datetimeFigureOut">
               <a:rPr lang="en-US" smtClean="0"/>
-              <a:t>10/7/2026</a:t>
+              <a:t>10/8/2026</a:t>
             </a:fld>
             <a:endParaRPr lang="en-US"/>
           </a:p>
@@ -1023,7 +1023,7 @@
           <a:p>
             <a:fld id="{846CE7D5-CF57-46EF-B807-FDD0502418D4}" type="datetimeFigureOut">
               <a:rPr lang="en-US" smtClean="0"/>
-              <a:t>10/7/2026</a:t>
+              <a:t>10/8/2026</a:t>
             </a:fld>
             <a:endParaRPr lang="en-US"/>
           </a:p>
@@ -1193,7 +1193,7 @@
           <a:p>
             <a:fld id="{846CE7D5-CF57-46EF-B807-FDD0502418D4}" type="datetimeFigureOut">
               <a:rPr lang="en-US" smtClean="0"/>
-              <a:t>10/7/2026</a:t>
+              <a:t>10/8/2026</a:t>
             </a:fld>
             <a:endParaRPr lang="en-US"/>
           </a:p>
@@ -1373,7 +1373,7 @@
           <a:p>
             <a:fld id="{846CE7D5-CF57-46EF-B807-FDD0502418D4}" type="datetimeFigureOut">
               <a:rPr lang="en-US" smtClean="0"/>
-              <a:t>10/7/2026</a:t>
+              <a:t>10/8/2026</a:t>
             </a:fld>
             <a:endParaRPr lang="en-US"/>
           </a:p>
@@ -1543,7 +1543,7 @@
           <a:p>
             <a:fld id="{846CE7D5-CF57-46EF-B807-FDD0502418D4}" type="datetimeFigureOut">
               <a:rPr lang="en-US" smtClean="0"/>
-              <a:t>10/7/2026</a:t>
+              <a:t>10/8/2026</a:t>
             </a:fld>
             <a:endParaRPr lang="en-US"/>
           </a:p>
@@ -1789,7 +1789,7 @@
           <a:p>
             <a:fld id="{846CE7D5-CF57-46EF-B807-FDD0502418D4}" type="datetimeFigureOut">
               <a:rPr lang="en-US" smtClean="0"/>
-              <a:t>10/7/2026</a:t>
+              <a:t>10/8/2026</a:t>
             </a:fld>
             <a:endParaRPr lang="en-US"/>
           </a:p>
@@ -2021,7 +2021,7 @@
           <a:p>
             <a:fld id="{846CE7D5-CF57-46EF-B807-FDD0502418D4}" type="datetimeFigureOut">
               <a:rPr lang="en-US" smtClean="0"/>
-              <a:t>10/7/2026</a:t>
+              <a:t>10/8/2026</a:t>
             </a:fld>
             <a:endParaRPr lang="en-US"/>
           </a:p>
@@ -2388,7 +2388,7 @@
           <a:p>
             <a:fld id="{846CE7D5-CF57-46EF-B807-FDD0502418D4}" type="datetimeFigureOut">
               <a:rPr lang="en-US" smtClean="0"/>
-              <a:t>10/7/2026</a:t>
+              <a:t>10/8/2026</a:t>
             </a:fld>
             <a:endParaRPr lang="en-US"/>
           </a:p>
@@ -2506,7 +2506,7 @@
           <a:p>
             <a:fld id="{846CE7D5-CF57-46EF-B807-FDD0502418D4}" type="datetimeFigureOut">
               <a:rPr lang="en-US" smtClean="0"/>
-              <a:t>10/7/2026</a:t>
+              <a:t>10/8/2026</a:t>
             </a:fld>
             <a:endParaRPr lang="en-US"/>
           </a:p>
@@ -2601,7 +2601,7 @@
           <a:p>
             <a:fld id="{846CE7D5-CF57-46EF-B807-FDD0502418D4}" type="datetimeFigureOut">
               <a:rPr lang="en-US" smtClean="0"/>
-              <a:t>10/7/2026</a:t>
+              <a:t>10/8/2026</a:t>
             </a:fld>
             <a:endParaRPr lang="en-US"/>
           </a:p>
@@ -2878,7 +2878,7 @@
           <a:p>
             <a:fld id="{846CE7D5-CF57-46EF-B807-FDD0502418D4}" type="datetimeFigureOut">
               <a:rPr lang="en-US" smtClean="0"/>
-              <a:t>10/7/2026</a:t>
+              <a:t>10/8/2026</a:t>
             </a:fld>
             <a:endParaRPr lang="en-US"/>
           </a:p>
@@ -3135,7 +3135,7 @@
           <a:p>
             <a:fld id="{846CE7D5-CF57-46EF-B807-FDD0502418D4}" type="datetimeFigureOut">
               <a:rPr lang="en-US" smtClean="0"/>
-              <a:t>10/7/2026</a:t>
+              <a:t>10/8/2026</a:t>
             </a:fld>
             <a:endParaRPr lang="en-US"/>
           </a:p>
@@ -3348,7 +3348,7 @@
           <a:p>
             <a:fld id="{846CE7D5-CF57-46EF-B807-FDD0502418D4}" type="datetimeFigureOut">
               <a:rPr lang="en-US" smtClean="0"/>
-              <a:t>10/7/2026</a:t>
+              <a:t>10/8/2026</a:t>
             </a:fld>
             <a:endParaRPr lang="en-US"/>
           </a:p>
